--- a/media/resources/files/Ekvivalenettuuluk_Onduktardan_menen_Bolchoktor-KazynaIzdoo_Oor.pptx
+++ b/media/resources/files/Ekvivalenettuuluk_Onduktardan_menen_Bolchoktor-KazynaIzdoo_Oor.pptx
@@ -22781,7 +22781,7 @@
                 <a:ea typeface="+mn-ea"/>
                 <a:cs typeface="+mn-cs"/>
               </a:rPr>
-              <a:t>Турдуу пикирлер учун ыраазычылык билдиребиз.</a:t>
+              <a:t>Түрдүү пикирлер үчүн ыраазычылык билдиребиз.</a:t>
             </a:r>
           </a:p>
           <a:p>

--- a/media/resources/files/Ekvivalenettuuluk_Onduktardan_menen_Bolchoktor-KazynaIzdoo_Oor.pptx
+++ b/media/resources/files/Ekvivalenettuuluk_Onduktardan_menen_Bolchoktor-KazynaIzdoo_Oor.pptx
@@ -3861,7 +3861,7 @@
             </a:r>
             <a:r>
               <a:rPr lang="ky-KG" sz="2400" dirty="0"/>
-              <a:t>Унутуп калбаш учун</a:t>
+              <a:t>Унутуп калбаш үчүн</a:t>
             </a:r>
             <a:endParaRPr lang="en-US" sz="2400" dirty="0"/>
           </a:p>
